--- a/figures/figure_2.pptx
+++ b/figures/figure_2.pptx
@@ -261,7 +261,7 @@
           <a:p>
             <a:fld id="{49E359EF-97D3-4CBF-B56E-D2EC8F2A80CB}" type="datetimeFigureOut">
               <a:rPr lang="de-AT" smtClean="0"/>
-              <a:t>19.11.2025</a:t>
+              <a:t>05.05.2026</a:t>
             </a:fld>
             <a:endParaRPr lang="de-AT"/>
           </a:p>
@@ -461,7 +461,7 @@
           <a:p>
             <a:fld id="{49E359EF-97D3-4CBF-B56E-D2EC8F2A80CB}" type="datetimeFigureOut">
               <a:rPr lang="de-AT" smtClean="0"/>
-              <a:t>19.11.2025</a:t>
+              <a:t>05.05.2026</a:t>
             </a:fld>
             <a:endParaRPr lang="de-AT"/>
           </a:p>
@@ -671,7 +671,7 @@
           <a:p>
             <a:fld id="{49E359EF-97D3-4CBF-B56E-D2EC8F2A80CB}" type="datetimeFigureOut">
               <a:rPr lang="de-AT" smtClean="0"/>
-              <a:t>19.11.2025</a:t>
+              <a:t>05.05.2026</a:t>
             </a:fld>
             <a:endParaRPr lang="de-AT"/>
           </a:p>
@@ -871,7 +871,7 @@
           <a:p>
             <a:fld id="{49E359EF-97D3-4CBF-B56E-D2EC8F2A80CB}" type="datetimeFigureOut">
               <a:rPr lang="de-AT" smtClean="0"/>
-              <a:t>19.11.2025</a:t>
+              <a:t>05.05.2026</a:t>
             </a:fld>
             <a:endParaRPr lang="de-AT"/>
           </a:p>
@@ -1147,7 +1147,7 @@
           <a:p>
             <a:fld id="{49E359EF-97D3-4CBF-B56E-D2EC8F2A80CB}" type="datetimeFigureOut">
               <a:rPr lang="de-AT" smtClean="0"/>
-              <a:t>19.11.2025</a:t>
+              <a:t>05.05.2026</a:t>
             </a:fld>
             <a:endParaRPr lang="de-AT"/>
           </a:p>
@@ -1415,7 +1415,7 @@
           <a:p>
             <a:fld id="{49E359EF-97D3-4CBF-B56E-D2EC8F2A80CB}" type="datetimeFigureOut">
               <a:rPr lang="de-AT" smtClean="0"/>
-              <a:t>19.11.2025</a:t>
+              <a:t>05.05.2026</a:t>
             </a:fld>
             <a:endParaRPr lang="de-AT"/>
           </a:p>
@@ -1830,7 +1830,7 @@
           <a:p>
             <a:fld id="{49E359EF-97D3-4CBF-B56E-D2EC8F2A80CB}" type="datetimeFigureOut">
               <a:rPr lang="de-AT" smtClean="0"/>
-              <a:t>19.11.2025</a:t>
+              <a:t>05.05.2026</a:t>
             </a:fld>
             <a:endParaRPr lang="de-AT"/>
           </a:p>
@@ -1972,7 +1972,7 @@
           <a:p>
             <a:fld id="{49E359EF-97D3-4CBF-B56E-D2EC8F2A80CB}" type="datetimeFigureOut">
               <a:rPr lang="de-AT" smtClean="0"/>
-              <a:t>19.11.2025</a:t>
+              <a:t>05.05.2026</a:t>
             </a:fld>
             <a:endParaRPr lang="de-AT"/>
           </a:p>
@@ -2085,7 +2085,7 @@
           <a:p>
             <a:fld id="{49E359EF-97D3-4CBF-B56E-D2EC8F2A80CB}" type="datetimeFigureOut">
               <a:rPr lang="de-AT" smtClean="0"/>
-              <a:t>19.11.2025</a:t>
+              <a:t>05.05.2026</a:t>
             </a:fld>
             <a:endParaRPr lang="de-AT"/>
           </a:p>
@@ -2398,7 +2398,7 @@
           <a:p>
             <a:fld id="{49E359EF-97D3-4CBF-B56E-D2EC8F2A80CB}" type="datetimeFigureOut">
               <a:rPr lang="de-AT" smtClean="0"/>
-              <a:t>19.11.2025</a:t>
+              <a:t>05.05.2026</a:t>
             </a:fld>
             <a:endParaRPr lang="de-AT"/>
           </a:p>
@@ -2687,7 +2687,7 @@
           <a:p>
             <a:fld id="{49E359EF-97D3-4CBF-B56E-D2EC8F2A80CB}" type="datetimeFigureOut">
               <a:rPr lang="de-AT" smtClean="0"/>
-              <a:t>19.11.2025</a:t>
+              <a:t>05.05.2026</a:t>
             </a:fld>
             <a:endParaRPr lang="de-AT"/>
           </a:p>
@@ -2930,7 +2930,7 @@
           <a:p>
             <a:fld id="{49E359EF-97D3-4CBF-B56E-D2EC8F2A80CB}" type="datetimeFigureOut">
               <a:rPr lang="de-AT" smtClean="0"/>
-              <a:t>19.11.2025</a:t>
+              <a:t>05.05.2026</a:t>
             </a:fld>
             <a:endParaRPr lang="de-AT"/>
           </a:p>
@@ -3362,21 +3362,20 @@
           <p:nvPr/>
         </p:nvPicPr>
         <p:blipFill>
-          <a:blip r:embed="rId2">
+          <a:blip>
             <a:extLst>
               <a:ext uri="{96DAC541-7B7A-43D3-8B79-37D633B846F1}">
-                <asvg:svgBlip xmlns:asvg="http://schemas.microsoft.com/office/drawing/2016/SVG/main" r:embed="rId3"/>
+                <asvg:svgBlip xmlns:asvg="http://schemas.microsoft.com/office/drawing/2016/SVG/main" r:embed="rId2"/>
               </a:ext>
             </a:extLst>
           </a:blip>
-          <a:stretch>
-            <a:fillRect/>
-          </a:stretch>
+          <a:srcRect/>
+          <a:stretch/>
         </p:blipFill>
         <p:spPr>
           <a:xfrm>
             <a:off x="552734" y="252482"/>
-            <a:ext cx="5659270" cy="3272931"/>
+            <a:ext cx="5659270" cy="3272930"/>
           </a:xfrm>
           <a:prstGeom prst="rect">
             <a:avLst/>
@@ -3506,10 +3505,10 @@
           <p:nvPr/>
         </p:nvPicPr>
         <p:blipFill>
-          <a:blip r:embed="rId4">
+          <a:blip>
             <a:extLst>
               <a:ext uri="{96DAC541-7B7A-43D3-8B79-37D633B846F1}">
-                <asvg:svgBlip xmlns:asvg="http://schemas.microsoft.com/office/drawing/2016/SVG/main" r:embed="rId5"/>
+                <asvg:svgBlip xmlns:asvg="http://schemas.microsoft.com/office/drawing/2016/SVG/main" r:embed="rId3"/>
               </a:ext>
             </a:extLst>
           </a:blip>
@@ -3542,10 +3541,10 @@
           <p:nvPr/>
         </p:nvPicPr>
         <p:blipFill>
-          <a:blip r:embed="rId6">
+          <a:blip>
             <a:extLst>
               <a:ext uri="{96DAC541-7B7A-43D3-8B79-37D633B846F1}">
-                <asvg:svgBlip xmlns:asvg="http://schemas.microsoft.com/office/drawing/2016/SVG/main" r:embed="rId7"/>
+                <asvg:svgBlip xmlns:asvg="http://schemas.microsoft.com/office/drawing/2016/SVG/main" r:embed="rId4"/>
               </a:ext>
             </a:extLst>
           </a:blip>
@@ -3614,10 +3613,10 @@
           <p:nvPr/>
         </p:nvPicPr>
         <p:blipFill>
-          <a:blip r:embed="rId8">
+          <a:blip>
             <a:extLst>
               <a:ext uri="{96DAC541-7B7A-43D3-8B79-37D633B846F1}">
-                <asvg:svgBlip xmlns:asvg="http://schemas.microsoft.com/office/drawing/2016/SVG/main" r:embed="rId9"/>
+                <asvg:svgBlip xmlns:asvg="http://schemas.microsoft.com/office/drawing/2016/SVG/main" r:embed="rId5"/>
               </a:ext>
             </a:extLst>
           </a:blip>
@@ -3686,10 +3685,10 @@
           <p:nvPr/>
         </p:nvPicPr>
         <p:blipFill>
-          <a:blip r:embed="rId10">
+          <a:blip>
             <a:extLst>
               <a:ext uri="{96DAC541-7B7A-43D3-8B79-37D633B846F1}">
-                <asvg:svgBlip xmlns:asvg="http://schemas.microsoft.com/office/drawing/2016/SVG/main" r:embed="rId11"/>
+                <asvg:svgBlip xmlns:asvg="http://schemas.microsoft.com/office/drawing/2016/SVG/main" r:embed="rId6"/>
               </a:ext>
             </a:extLst>
           </a:blip>
